--- a/slides/release/01-how-ai-works.pptx
+++ b/slides/release/01-how-ai-works.pptx
@@ -2430,52 +2430,44 @@
           <a:lstStyle/>
           <a:p>
             <a:r>
-              <a:rPr dirty="0"/>
               <a:t> Same model, same question — small wording change, large output change.</a:t>
             </a:r>
           </a:p>
           <a:p>
-            <a:endParaRPr dirty="0"/>
-          </a:p>
-          <a:p>
-            <a:endParaRPr dirty="0"/>
-          </a:p>
-          <a:p>
-            <a:endParaRPr lang="en-US" dirty="0"/>
-          </a:p>
-          <a:p>
-            <a:endParaRPr lang="en-US" dirty="0"/>
-          </a:p>
-          <a:p>
-            <a:r>
-              <a:rPr dirty="0"/>
+            <a:endParaRPr/>
+          </a:p>
+          <a:p>
+            <a:endParaRPr/>
+          </a:p>
+          <a:p>
+            <a:endParaRPr/>
+          </a:p>
+          <a:p>
+            <a:r>
               <a:t> The model didn't get smarter. You gave it a</a:t>
             </a:r>
             <a:r>
-              <a:rPr b="1" dirty="0"/>
+              <a:rPr b="1"/>
               <a:t> direction to steer toward</a:t>
             </a:r>
             <a:r>
-              <a:rPr dirty="0"/>
               <a:t> : audience, job, focus, length.</a:t>
             </a:r>
           </a:p>
           <a:p>
             <a:r>
-              <a:rPr dirty="0"/>
               <a:t> That's the whole course in one slide. Module 2 makes it a repeatable</a:t>
             </a:r>
             <a:r>
-              <a:rPr b="1" dirty="0"/>
+              <a:rPr b="1"/>
               <a:t> anatomy</a:t>
             </a:r>
             <a:r>
-              <a:rPr dirty="0"/>
               <a:t> .</a:t>
             </a:r>
           </a:p>
           <a:p>
-            <a:endParaRPr dirty="0"/>
+            <a:endParaRPr/>
           </a:p>
         </p:txBody>
       </p:sp>
@@ -2528,7 +2520,7 @@
         </p:blipFill>
         <p:spPr>
           <a:xfrm>
-            <a:off x="222250" y="2015331"/>
+            <a:off x="212725" y="1862931"/>
             <a:ext cx="8915400" cy="1237308"/>
           </a:xfrm>
           <a:prstGeom prst="rect">
@@ -2544,7 +2536,7 @@
         </p:nvSpPr>
         <p:spPr>
           <a:xfrm>
-            <a:off x="675513" y="6130131"/>
+            <a:off x="571500" y="5596731"/>
             <a:ext cx="7507224" cy="1316736"/>
           </a:xfrm>
           <a:prstGeom prst="rect">
@@ -2747,7 +2739,7 @@
         </p:nvSpPr>
         <p:spPr>
           <a:xfrm>
-            <a:off x="675513" y="6206331"/>
+            <a:off x="234950" y="6425063"/>
             <a:ext cx="7507224" cy="877824"/>
           </a:xfrm>
           <a:prstGeom prst="rect">
@@ -2925,8 +2917,8 @@
         </p:nvSpPr>
         <p:spPr>
           <a:xfrm>
-            <a:off x="419100" y="4834731"/>
-            <a:ext cx="8229600" cy="1676400"/>
+            <a:off x="342900" y="4987131"/>
+            <a:ext cx="7507224" cy="1316736"/>
           </a:xfrm>
           <a:prstGeom prst="rect">
             <a:avLst/>
@@ -2960,7 +2952,7 @@
           <a:p>
             <a:pPr algn="ctr"/>
             <a:r>
-              <a:rPr sz="1800" i="1">
+              <a:rPr sz="1800" i="1" dirty="0">
                 <a:solidFill>
                   <a:srgbClr val="333333"/>
                 </a:solidFill>
@@ -3137,251 +3129,7 @@
         </p:nvSpPr>
         <p:spPr>
           <a:xfrm>
-            <a:off x="704088" y="5215731"/>
-            <a:ext cx="8097012" cy="1219200"/>
-          </a:xfrm>
-          <a:prstGeom prst="rect">
-            <a:avLst/>
-          </a:prstGeom>
-          <a:solidFill>
-            <a:srgbClr val="F2F2F2"/>
-          </a:solidFill>
-          <a:ln>
-            <a:solidFill>
-              <a:srgbClr val="D9D9D9"/>
-            </a:solidFill>
-          </a:ln>
-        </p:spPr>
-        <p:style>
-          <a:lnRef idx="1">
-            <a:schemeClr val="accent1"/>
-          </a:lnRef>
-          <a:fillRef idx="3">
-            <a:schemeClr val="accent1"/>
-          </a:fillRef>
-          <a:effectRef idx="2">
-            <a:schemeClr val="accent1"/>
-          </a:effectRef>
-          <a:fontRef idx="minor">
-            <a:schemeClr val="lt1"/>
-          </a:fontRef>
-        </p:style>
-        <p:txBody>
-          <a:bodyPr lIns="128016" tIns="73152" rIns="128016" bIns="73152" rtlCol="0" anchor="ctr"/>
-          <a:lstStyle/>
-          <a:p>
-            <a:pPr algn="ctr"/>
-            <a:r>
-              <a:rPr sz="1800" i="1">
-                <a:solidFill>
-                  <a:srgbClr val="333333"/>
-                </a:solidFill>
-              </a:rPr>
-              <a:t>One variable at a time. That discipline turns "AI is hit or miss" into "I can predict what I'll get."</a:t>
-            </a:r>
-          </a:p>
-        </p:txBody>
-      </p:sp>
-    </p:spTree>
-  </p:cSld>
-  <p:clrMapOvr>
-    <a:masterClrMapping/>
-  </p:clrMapOvr>
-</p:sld>
-</file>
-
-<file path=ppt/slides/slide2.xml><?xml version="1.0" encoding="utf-8"?>
-<p:sld xmlns:a="http://schemas.openxmlformats.org/drawingml/2006/main" xmlns:r="http://schemas.openxmlformats.org/officeDocument/2006/relationships" xmlns:p="http://schemas.openxmlformats.org/presentationml/2006/main">
-  <p:cSld>
-    <p:spTree>
-      <p:nvGrpSpPr>
-        <p:cNvPr id="1" name=""/>
-        <p:cNvGrpSpPr/>
-        <p:nvPr/>
-      </p:nvGrpSpPr>
-      <p:grpSpPr>
-        <a:xfrm>
-          <a:off x="0" y="0"/>
-          <a:ext cx="0" cy="0"/>
-          <a:chOff x="0" y="0"/>
-          <a:chExt cx="0" cy="0"/>
-        </a:xfrm>
-      </p:grpSpPr>
-      <p:sp>
-        <p:nvSpPr>
-          <p:cNvPr id="2" name="Title 1"/>
-          <p:cNvSpPr>
-            <a:spLocks noGrp="1"/>
-          </p:cNvSpPr>
-          <p:nvPr>
-            <p:ph type="title"/>
-          </p:nvPr>
-        </p:nvSpPr>
-        <p:spPr/>
-        <p:txBody>
-          <a:bodyPr/>
-          <a:lstStyle/>
-          <a:p>
-            <a:r>
-              <a:t>Why This Module</a:t>
-            </a:r>
-          </a:p>
-        </p:txBody>
-      </p:sp>
-      <p:sp>
-        <p:nvSpPr>
-          <p:cNvPr id="3" name="Content Placeholder 2"/>
-          <p:cNvSpPr>
-            <a:spLocks noGrp="1"/>
-          </p:cNvSpPr>
-          <p:nvPr>
-            <p:ph idx="1"/>
-          </p:nvPr>
-        </p:nvSpPr>
-        <p:spPr/>
-        <p:txBody>
-          <a:bodyPr/>
-          <a:lstStyle/>
-          <a:p>
-            <a:r>
-              <a:rPr dirty="0"/>
-              <a:t> Can't steer a tool you don't understand — a practical mental model first.</a:t>
-            </a:r>
-          </a:p>
-          <a:p>
-            <a:r>
-              <a:rPr dirty="0"/>
-              <a:t> We skip the math — just enough to</a:t>
-            </a:r>
-            <a:r>
-              <a:rPr b="1" dirty="0"/>
-              <a:t> predict</a:t>
-            </a:r>
-            <a:r>
-              <a:rPr dirty="0"/>
-              <a:t> the assistant's behavior.</a:t>
-            </a:r>
-          </a:p>
-          <a:p>
-            <a:r>
-              <a:rPr dirty="0"/>
-              <a:t> By the end you can:</a:t>
-            </a:r>
-          </a:p>
-          <a:p>
-            <a:pPr lvl="1"/>
-            <a:r>
-              <a:rPr dirty="0"/>
-              <a:t> Say in plain language what an LLM actually does.</a:t>
-            </a:r>
-          </a:p>
-          <a:p>
-            <a:pPr lvl="1"/>
-            <a:r>
-              <a:rPr dirty="0"/>
-              <a:t> Explain</a:t>
-            </a:r>
-            <a:r>
-              <a:rPr b="1" dirty="0"/>
-              <a:t> tokens, context window, temperature, hallucination</a:t>
-            </a:r>
-            <a:r>
-              <a:rPr dirty="0"/>
-              <a:t> — no jargon.</a:t>
-            </a:r>
-          </a:p>
-          <a:p>
-            <a:pPr lvl="1"/>
-            <a:r>
-              <a:rPr dirty="0"/>
-              <a:t> Pick a</a:t>
-            </a:r>
-            <a:r>
-              <a:rPr b="1" dirty="0"/>
-              <a:t> fast</a:t>
-            </a:r>
-            <a:r>
-              <a:rPr dirty="0"/>
-              <a:t> vs. a</a:t>
-            </a:r>
-            <a:r>
-              <a:rPr b="1" dirty="0"/>
-              <a:t> reasoning</a:t>
-            </a:r>
-            <a:r>
-              <a:rPr dirty="0"/>
-              <a:t> model on purpose.</a:t>
-            </a:r>
-          </a:p>
-          <a:p>
-            <a:pPr lvl="1"/>
-            <a:r>
-              <a:rPr dirty="0"/>
-              <a:t> Choose deliberately between Claude, ChatGPT, Gemini.</a:t>
-            </a:r>
-          </a:p>
-          <a:p>
-            <a:pPr lvl="1"/>
-            <a:r>
-              <a:rPr dirty="0"/>
-              <a:t> See</a:t>
-            </a:r>
-            <a:r>
-              <a:rPr i="1" dirty="0"/>
-              <a:t> why</a:t>
-            </a:r>
-            <a:r>
-              <a:rPr dirty="0"/>
-              <a:t> the prompt is the steering wheel.</a:t>
-            </a:r>
-          </a:p>
-          <a:p>
-            <a:endParaRPr dirty="0"/>
-          </a:p>
-        </p:txBody>
-      </p:sp>
-      <p:sp>
-        <p:nvSpPr>
-          <p:cNvPr id="4" name="TextBox 3"/>
-          <p:cNvSpPr txBox="1"/>
-          <p:nvPr/>
-        </p:nvSpPr>
-        <p:spPr>
-          <a:xfrm>
-            <a:off x="704088" y="8065008"/>
-            <a:ext cx="8915400" cy="228600"/>
-          </a:xfrm>
-          <a:prstGeom prst="rect">
-            <a:avLst/>
-          </a:prstGeom>
-          <a:noFill/>
-        </p:spPr>
-        <p:txBody>
-          <a:bodyPr wrap="none">
-            <a:spAutoFit/>
-          </a:bodyPr>
-          <a:lstStyle/>
-          <a:p>
-            <a:r>
-              <a:rPr sz="800">
-                <a:solidFill>
-                  <a:srgbClr val="000000"/>
-                </a:solidFill>
-              </a:rPr>
-              <a:t>Copyright © 2026 by Elephant Scale, All Rights Reserved</a:t>
-            </a:r>
-          </a:p>
-        </p:txBody>
-      </p:sp>
-      <p:sp>
-        <p:nvSpPr>
-          <p:cNvPr id="5" name="Rectangle 4"/>
-          <p:cNvSpPr/>
-          <p:nvPr/>
-        </p:nvSpPr>
-        <p:spPr>
-          <a:xfrm>
-            <a:off x="571500" y="6397281"/>
+            <a:off x="704088" y="6053931"/>
             <a:ext cx="7507224" cy="877824"/>
           </a:xfrm>
           <a:prstGeom prst="rect">
@@ -3416,12 +3164,12 @@
           <a:p>
             <a:pPr algn="ctr"/>
             <a:r>
-              <a:rPr sz="1800" i="1" dirty="0">
+              <a:rPr sz="1800" i="1">
                 <a:solidFill>
                   <a:srgbClr val="333333"/>
                 </a:solidFill>
               </a:rPr>
-              <a:t>The goal isn't to make you an engineer. It's to stop the assistant surprising you.</a:t>
+              <a:t>One variable at a time. That discipline turns "AI is hit or miss" into "I can predict what I'll get."</a:t>
             </a:r>
           </a:p>
         </p:txBody>
@@ -3434,7 +3182,7 @@
 </p:sld>
 </file>
 
-<file path=ppt/slides/slide3.xml><?xml version="1.0" encoding="utf-8"?>
+<file path=ppt/slides/slide2.xml><?xml version="1.0" encoding="utf-8"?>
 <p:sld xmlns:a="http://schemas.openxmlformats.org/drawingml/2006/main" xmlns:r="http://schemas.openxmlformats.org/officeDocument/2006/relationships" xmlns:p="http://schemas.openxmlformats.org/presentationml/2006/main">
   <p:cSld>
     <p:spTree>
@@ -3467,7 +3215,7 @@
           <a:lstStyle/>
           <a:p>
             <a:r>
-              <a:t>What a Language Model Actually Does</a:t>
+              <a:t>Why This Module</a:t>
             </a:r>
           </a:p>
         </p:txBody>
@@ -3488,61 +3236,82 @@
           <a:lstStyle/>
           <a:p>
             <a:r>
-              <a:t> One job:</a:t>
+              <a:t> Can't steer a tool you don't understand — a practical mental model first.</a:t>
+            </a:r>
+          </a:p>
+          <a:p>
+            <a:r>
+              <a:t> We skip the math — just enough to</a:t>
             </a:r>
             <a:r>
               <a:rPr b="1"/>
-              <a:t> predict the next word</a:t>
-            </a:r>
-            <a:r>
-              <a:t> , over and over, given everything so far.</a:t>
+              <a:t> predict</a:t>
+            </a:r>
+            <a:r>
+              <a:t> the assistant's behavior.</a:t>
+            </a:r>
+          </a:p>
+          <a:p>
+            <a:r>
+              <a:t> By the end you can:</a:t>
             </a:r>
           </a:p>
           <a:p>
             <a:pPr lvl="1"/>
             <a:r>
-              <a:t> Trained on a staggering amount of text — learned the patterns of language.</a:t>
+              <a:t> Say in plain language what an LLM actually does.</a:t>
             </a:r>
           </a:p>
           <a:p>
             <a:pPr lvl="1"/>
             <a:r>
-              <a:t> Your prompt + the chat so far = "everything so far." It continues it.</a:t>
-            </a:r>
-          </a:p>
-          <a:p>
-            <a:r>
-              <a:t> This one fact explains almost all its behavior:</a:t>
+              <a:t> Explain</a:t>
+            </a:r>
+            <a:r>
+              <a:rPr b="1"/>
+              <a:t> tokens, context window, temperature, hallucination</a:t>
+            </a:r>
+            <a:r>
+              <a:t> — no jargon.</a:t>
             </a:r>
           </a:p>
           <a:p>
             <a:pPr lvl="1"/>
             <a:r>
+              <a:t> Pick a</a:t>
+            </a:r>
+            <a:r>
               <a:rPr b="1"/>
-              <a:t> Astonishingly fluent</a:t>
-            </a:r>
-            <a:r>
-              <a:t> — fluency is what it was trained for.</a:t>
+              <a:t> fast</a:t>
+            </a:r>
+            <a:r>
+              <a:t> vs. a</a:t>
+            </a:r>
+            <a:r>
+              <a:rPr b="1"/>
+              <a:t> reasoning</a:t>
+            </a:r>
+            <a:r>
+              <a:t> model on purpose.</a:t>
             </a:r>
           </a:p>
           <a:p>
             <a:pPr lvl="1"/>
             <a:r>
-              <a:rPr b="1"/>
-              <a:t> Confidently wrong</a:t>
-            </a:r>
-            <a:r>
-              <a:t> — plausible ≠ true.</a:t>
+              <a:t> Choose deliberately between ChatGPT, Claude, Gemini.</a:t>
             </a:r>
           </a:p>
           <a:p>
             <a:pPr lvl="1"/>
             <a:r>
-              <a:rPr b="1"/>
-              <a:t> No database to look in</a:t>
-            </a:r>
-            <a:r>
-              <a:t> — unless you give it one (file, search tool).</a:t>
+              <a:t> See</a:t>
+            </a:r>
+            <a:r>
+              <a:rPr i="1"/>
+              <a:t> why</a:t>
+            </a:r>
+            <a:r>
+              <a:t> the prompt is the steering wheel.</a:t>
             </a:r>
           </a:p>
           <a:p>
@@ -3591,7 +3360,7 @@
         </p:nvSpPr>
         <p:spPr>
           <a:xfrm>
-            <a:off x="650938" y="6425063"/>
+            <a:off x="495300" y="6282531"/>
             <a:ext cx="7507224" cy="877824"/>
           </a:xfrm>
           <a:prstGeom prst="rect">
@@ -3626,12 +3395,12 @@
           <a:p>
             <a:pPr algn="ctr"/>
             <a:r>
-              <a:rPr sz="1800" i="1" dirty="0">
+              <a:rPr sz="1800" i="1">
                 <a:solidFill>
                   <a:srgbClr val="333333"/>
                 </a:solidFill>
               </a:rPr>
-              <a:t>A pattern-completion engine, not a fact-retrieval engine. Fluent output = a draft to verify.</a:t>
+              <a:t>The goal isn't to make you an engineer. It's to stop the assistant surprising you.</a:t>
             </a:r>
           </a:p>
         </p:txBody>
@@ -3644,7 +3413,7 @@
 </p:sld>
 </file>
 
-<file path=ppt/slides/slide4.xml><?xml version="1.0" encoding="utf-8"?>
+<file path=ppt/slides/slide3.xml><?xml version="1.0" encoding="utf-8"?>
 <p:sld xmlns:a="http://schemas.openxmlformats.org/drawingml/2006/main" xmlns:r="http://schemas.openxmlformats.org/officeDocument/2006/relationships" xmlns:p="http://schemas.openxmlformats.org/presentationml/2006/main">
   <p:cSld>
     <p:spTree>
@@ -3677,7 +3446,7 @@
           <a:lstStyle/>
           <a:p>
             <a:r>
-              <a:t>The Overconfident Junior Colleague</a:t>
+              <a:t>What a Language Model Actually Does</a:t>
             </a:r>
           </a:p>
         </p:txBody>
@@ -3698,74 +3467,61 @@
           <a:lstStyle/>
           <a:p>
             <a:r>
-              <a:t> Best mental model: a</a:t>
+              <a:t> One job:</a:t>
             </a:r>
             <a:r>
               <a:rPr b="1"/>
-              <a:t> sharp, fast, slightly overconfident junior colleague</a:t>
-            </a:r>
-            <a:r>
-              <a:t> .</a:t>
+              <a:t> predict the next word</a:t>
+            </a:r>
+            <a:r>
+              <a:t> , over and over, given everything so far.</a:t>
             </a:r>
           </a:p>
           <a:p>
             <a:pPr lvl="1"/>
             <a:r>
-              <a:t> Brilliant at drafting, reformatting, summarizing, explaining itself.</a:t>
+              <a:t> Trained on a staggering amount of text — learned the patterns of language.</a:t>
             </a:r>
           </a:p>
           <a:p>
             <a:pPr lvl="1"/>
             <a:r>
-              <a:t> Occasionally wrong with total confidence — and won't flag it unless asked.</a:t>
-            </a:r>
-          </a:p>
-          <a:p>
-            <a:r>
-              <a:t> Manage that colleague exactly how you prompt:</a:t>
+              <a:t> Your prompt + the chat so far = "everything so far." It continues it.</a:t>
+            </a:r>
+          </a:p>
+          <a:p>
+            <a:r>
+              <a:t> This one fact explains almost all its behavior:</a:t>
             </a:r>
           </a:p>
           <a:p>
             <a:pPr lvl="1"/>
             <a:r>
               <a:rPr b="1"/>
-              <a:t> Clear direction</a:t>
-            </a:r>
-            <a:r>
-              <a:t> — what, for whom, in what form.</a:t>
+              <a:t> Astonishingly fluent</a:t>
+            </a:r>
+            <a:r>
+              <a:t> — fluency is what it was trained for.</a:t>
             </a:r>
           </a:p>
           <a:p>
             <a:pPr lvl="1"/>
             <a:r>
               <a:rPr b="1"/>
-              <a:t> Hand over the source</a:t>
-            </a:r>
-            <a:r>
-              <a:t> — don't ask from memory.</a:t>
+              <a:t> Confidently wrong</a:t>
+            </a:r>
+            <a:r>
+              <a:t> — plausible ≠ true.</a:t>
             </a:r>
           </a:p>
           <a:p>
             <a:pPr lvl="1"/>
             <a:r>
               <a:rPr b="1"/>
-              <a:t> Review</a:t>
-            </a:r>
-            <a:r>
-              <a:t> against your intent.</a:t>
-            </a:r>
-          </a:p>
-          <a:p>
-            <a:pPr lvl="1"/>
-            <a:r>
-              <a:t> Ask the</a:t>
-            </a:r>
-            <a:r>
-              <a:rPr b="1"/>
-              <a:t> catch-the-mistake</a:t>
-            </a:r>
-            <a:r>
-              <a:t> follow-up.</a:t>
+              <a:t> No database to look in</a:t>
+            </a:r>
+            <a:r>
+              <a:t> — unless you give it one (file, search tool).</a:t>
             </a:r>
           </a:p>
           <a:p>
@@ -3814,7 +3570,7 @@
         </p:nvSpPr>
         <p:spPr>
           <a:xfrm>
-            <a:off x="495300" y="6053931"/>
+            <a:off x="704088" y="6282531"/>
             <a:ext cx="7507224" cy="877824"/>
           </a:xfrm>
           <a:prstGeom prst="rect">
@@ -3854,7 +3610,7 @@
                   <a:srgbClr val="333333"/>
                 </a:solidFill>
               </a:rPr>
-              <a:t>You already know how to get good work out of a talented junior. Prompting is that skill, typed.</a:t>
+              <a:t>A pattern-completion engine, not a fact-retrieval engine. Fluent output = a draft to verify.</a:t>
             </a:r>
           </a:p>
         </p:txBody>
@@ -3867,7 +3623,7 @@
 </p:sld>
 </file>
 
-<file path=ppt/slides/slide5.xml><?xml version="1.0" encoding="utf-8"?>
+<file path=ppt/slides/slide4.xml><?xml version="1.0" encoding="utf-8"?>
 <p:sld xmlns:a="http://schemas.openxmlformats.org/drawingml/2006/main" xmlns:r="http://schemas.openxmlformats.org/officeDocument/2006/relationships" xmlns:p="http://schemas.openxmlformats.org/presentationml/2006/main">
   <p:cSld>
     <p:spTree>
@@ -3900,7 +3656,7 @@
           <a:lstStyle/>
           <a:p>
             <a:r>
-              <a:t>Key Terms Without the Jargon</a:t>
+              <a:t>The Overconfident Junior Colleague</a:t>
             </a:r>
           </a:p>
         </p:txBody>
@@ -3921,60 +3677,74 @@
           <a:lstStyle/>
           <a:p>
             <a:r>
+              <a:t> Best mental model: a</a:t>
+            </a:r>
+            <a:r>
               <a:rPr b="1"/>
-              <a:t> Model</a:t>
-            </a:r>
-            <a:r>
-              <a:t> — the specific "brain" (Claude Opus, GPT-5, Gemini). Newer/larger = more capable, slower, pricier.</a:t>
-            </a:r>
-          </a:p>
-          <a:p>
+              <a:t> sharp, fast, slightly overconfident junior colleague</a:t>
+            </a:r>
+            <a:r>
+              <a:t> .</a:t>
+            </a:r>
+          </a:p>
+          <a:p>
+            <a:pPr lvl="1"/>
+            <a:r>
+              <a:t> Brilliant at drafting, reformatting, summarizing, explaining itself.</a:t>
+            </a:r>
+          </a:p>
+          <a:p>
+            <a:pPr lvl="1"/>
+            <a:r>
+              <a:t> Occasionally wrong with total confidence — and won't flag it unless asked.</a:t>
+            </a:r>
+          </a:p>
+          <a:p>
+            <a:r>
+              <a:t> Manage that colleague exactly how you prompt:</a:t>
+            </a:r>
+          </a:p>
+          <a:p>
+            <a:pPr lvl="1"/>
             <a:r>
               <a:rPr b="1"/>
-              <a:t> Token</a:t>
-            </a:r>
-            <a:r>
-              <a:t> — the chunk it reads and writes in. ~¾ of a word. Limits are measured in these.</a:t>
-            </a:r>
-          </a:p>
-          <a:p>
+              <a:t> Clear direction</a:t>
+            </a:r>
+            <a:r>
+              <a:t> — what, for whom, in what form.</a:t>
+            </a:r>
+          </a:p>
+          <a:p>
+            <a:pPr lvl="1"/>
             <a:r>
               <a:rPr b="1"/>
-              <a:t> Context window</a:t>
-            </a:r>
-            <a:r>
-              <a:t> — its short-term memory: prompt + attachments + conversation, in tokens.</a:t>
+              <a:t> Hand over the source</a:t>
+            </a:r>
+            <a:r>
+              <a:t> — don't ask from memory.</a:t>
             </a:r>
           </a:p>
           <a:p>
             <a:pPr lvl="1"/>
             <a:r>
-              <a:t> Huge today — a whole report fits. But</a:t>
-            </a:r>
-            <a:r>
               <a:rPr b="1"/>
-              <a:t> not permanent</a:t>
-            </a:r>
-            <a:r>
-              <a:t> — a new chat starts blank.</a:t>
-            </a:r>
-          </a:p>
-          <a:p>
+              <a:t> Review</a:t>
+            </a:r>
+            <a:r>
+              <a:t> against your intent.</a:t>
+            </a:r>
+          </a:p>
+          <a:p>
+            <a:pPr lvl="1"/>
+            <a:r>
+              <a:t> Ask the</a:t>
+            </a:r>
             <a:r>
               <a:rPr b="1"/>
-              <a:t> Temperature</a:t>
-            </a:r>
-            <a:r>
-              <a:t> — a creativity dial. Low = focused/repeatable, high = varied. Usually hidden.</a:t>
-            </a:r>
-          </a:p>
-          <a:p>
-            <a:r>
-              <a:rPr b="1"/>
-              <a:t> Hallucination</a:t>
-            </a:r>
-            <a:r>
-              <a:t> — states something false as true. Not lying — pattern-completion gone wrong.</a:t>
+              <a:t> catch-the-mistake</a:t>
+            </a:r>
+            <a:r>
+              <a:t> follow-up.</a:t>
             </a:r>
           </a:p>
           <a:p>
@@ -4023,7 +3793,7 @@
         </p:nvSpPr>
         <p:spPr>
           <a:xfrm>
-            <a:off x="495300" y="6425063"/>
+            <a:off x="704088" y="6053931"/>
             <a:ext cx="7507224" cy="877824"/>
           </a:xfrm>
           <a:prstGeom prst="rect">
@@ -4063,7 +3833,7 @@
                   <a:srgbClr val="333333"/>
                 </a:solidFill>
               </a:rPr>
-              <a:t>No math here. Each term predicts a behavior you'll see in the labs.</a:t>
+              <a:t>You already know how to get good work out of a talented junior. Prompting is that skill, typed.</a:t>
             </a:r>
           </a:p>
         </p:txBody>
@@ -4076,7 +3846,7 @@
 </p:sld>
 </file>
 
-<file path=ppt/slides/slide6.xml><?xml version="1.0" encoding="utf-8"?>
+<file path=ppt/slides/slide5.xml><?xml version="1.0" encoding="utf-8"?>
 <p:sld xmlns:a="http://schemas.openxmlformats.org/drawingml/2006/main" xmlns:r="http://schemas.openxmlformats.org/officeDocument/2006/relationships" xmlns:p="http://schemas.openxmlformats.org/presentationml/2006/main">
   <p:cSld>
     <p:spTree>
@@ -4109,7 +3879,7 @@
           <a:lstStyle/>
           <a:p>
             <a:r>
-              <a:t>Why the Same Question Gives Different Answers</a:t>
+              <a:t>Key Terms Without the Jargon</a:t>
             </a:r>
           </a:p>
         </p:txBody>
@@ -4130,65 +3900,60 @@
           <a:lstStyle/>
           <a:p>
             <a:r>
-              <a:t> Same question twice, two different answers. Why:</a:t>
+              <a:rPr b="1"/>
+              <a:t> Model</a:t>
+            </a:r>
+            <a:r>
+              <a:t> — the specific "brain" (GPT-5, Claude Opus, Gemini). Newer/larger = more capable, slower, pricier.</a:t>
+            </a:r>
+          </a:p>
+          <a:p>
+            <a:r>
+              <a:rPr b="1"/>
+              <a:t> Token</a:t>
+            </a:r>
+            <a:r>
+              <a:t> — the chunk it reads and writes in. ~¾ of a word. Limits are measured in these.</a:t>
+            </a:r>
+          </a:p>
+          <a:p>
+            <a:r>
+              <a:rPr b="1"/>
+              <a:t> Context window</a:t>
+            </a:r>
+            <a:r>
+              <a:t> — its short-term memory: prompt + attachments + conversation, in tokens.</a:t>
             </a:r>
           </a:p>
           <a:p>
             <a:pPr lvl="1"/>
+            <a:r>
+              <a:t> Huge today — a whole report fits. But</a:t>
+            </a:r>
+            <a:r>
+              <a:rPr b="1"/>
+              <a:t> not permanent</a:t>
+            </a:r>
+            <a:r>
+              <a:t> — a new chat starts blank.</a:t>
+            </a:r>
+          </a:p>
+          <a:p>
             <a:r>
               <a:rPr b="1"/>
               <a:t> Temperature</a:t>
             </a:r>
             <a:r>
-              <a:t> — deliberate randomness in word choice.</a:t>
-            </a:r>
-          </a:p>
-          <a:p>
-            <a:pPr lvl="1"/>
+              <a:t> — a creativity dial. Low = focused/repeatable, high = varied. Usually hidden.</a:t>
+            </a:r>
+          </a:p>
+          <a:p>
             <a:r>
               <a:rPr b="1"/>
-              <a:t> Memory / custom instructions</a:t>
-            </a:r>
-            <a:r>
-              <a:t> — saved settings quietly reshape output.</a:t>
-            </a:r>
-          </a:p>
-          <a:p>
-            <a:pPr lvl="1"/>
-            <a:r>
-              <a:rPr b="1"/>
-              <a:t> Model version</a:t>
-            </a:r>
-            <a:r>
-              <a:t> — vendors update continuously; yesterday's answer isn't promised.</a:t>
-            </a:r>
-          </a:p>
-          <a:p>
-            <a:r>
-              <a:t> So every</a:t>
-            </a:r>
-            <a:r>
-              <a:rPr b="1"/>
-              <a:t> comparison</a:t>
-            </a:r>
-            <a:r>
-              <a:t> in this course starts from a clean slate:</a:t>
-            </a:r>
-          </a:p>
-          <a:p>
-            <a:pPr lvl="1"/>
-            <a:r>
-              <a:rPr b="1"/>
-              <a:t> New or temporary chat</a:t>
-            </a:r>
-            <a:r>
-              <a:t> , memory and custom instructions off.</a:t>
-            </a:r>
-          </a:p>
-          <a:p>
-            <a:pPr lvl="1"/>
-            <a:r>
-              <a:t> Otherwise you're comparing your settings, not the prompt or tool.</a:t>
+              <a:t> Hallucination</a:t>
+            </a:r>
+            <a:r>
+              <a:t> — states something false as true. Not lying — pattern-completion gone wrong.</a:t>
             </a:r>
           </a:p>
           <a:p>
@@ -4237,7 +4002,7 @@
         </p:nvSpPr>
         <p:spPr>
           <a:xfrm>
-            <a:off x="670750" y="5977731"/>
+            <a:off x="704088" y="5742431"/>
             <a:ext cx="7507224" cy="877824"/>
           </a:xfrm>
           <a:prstGeom prst="rect">
@@ -4277,6 +4042,220 @@
                   <a:srgbClr val="333333"/>
                 </a:solidFill>
               </a:rPr>
+              <a:t>No math here. Each term predicts a behavior you'll see in the labs.</a:t>
+            </a:r>
+          </a:p>
+        </p:txBody>
+      </p:sp>
+    </p:spTree>
+  </p:cSld>
+  <p:clrMapOvr>
+    <a:masterClrMapping/>
+  </p:clrMapOvr>
+</p:sld>
+</file>
+
+<file path=ppt/slides/slide6.xml><?xml version="1.0" encoding="utf-8"?>
+<p:sld xmlns:a="http://schemas.openxmlformats.org/drawingml/2006/main" xmlns:r="http://schemas.openxmlformats.org/officeDocument/2006/relationships" xmlns:p="http://schemas.openxmlformats.org/presentationml/2006/main">
+  <p:cSld>
+    <p:spTree>
+      <p:nvGrpSpPr>
+        <p:cNvPr id="1" name=""/>
+        <p:cNvGrpSpPr/>
+        <p:nvPr/>
+      </p:nvGrpSpPr>
+      <p:grpSpPr>
+        <a:xfrm>
+          <a:off x="0" y="0"/>
+          <a:ext cx="0" cy="0"/>
+          <a:chOff x="0" y="0"/>
+          <a:chExt cx="0" cy="0"/>
+        </a:xfrm>
+      </p:grpSpPr>
+      <p:sp>
+        <p:nvSpPr>
+          <p:cNvPr id="2" name="Title 1"/>
+          <p:cNvSpPr>
+            <a:spLocks noGrp="1"/>
+          </p:cNvSpPr>
+          <p:nvPr>
+            <p:ph type="title"/>
+          </p:nvPr>
+        </p:nvSpPr>
+        <p:spPr/>
+        <p:txBody>
+          <a:bodyPr/>
+          <a:lstStyle/>
+          <a:p>
+            <a:r>
+              <a:t>Why the Same Question Gives Different Answers</a:t>
+            </a:r>
+          </a:p>
+        </p:txBody>
+      </p:sp>
+      <p:sp>
+        <p:nvSpPr>
+          <p:cNvPr id="3" name="Content Placeholder 2"/>
+          <p:cNvSpPr>
+            <a:spLocks noGrp="1"/>
+          </p:cNvSpPr>
+          <p:nvPr>
+            <p:ph idx="1"/>
+          </p:nvPr>
+        </p:nvSpPr>
+        <p:spPr/>
+        <p:txBody>
+          <a:bodyPr/>
+          <a:lstStyle/>
+          <a:p>
+            <a:r>
+              <a:t> Same question twice, two different answers. Why:</a:t>
+            </a:r>
+          </a:p>
+          <a:p>
+            <a:pPr lvl="1"/>
+            <a:r>
+              <a:rPr b="1"/>
+              <a:t> Temperature</a:t>
+            </a:r>
+            <a:r>
+              <a:t> — deliberate randomness in word choice.</a:t>
+            </a:r>
+          </a:p>
+          <a:p>
+            <a:pPr lvl="1"/>
+            <a:r>
+              <a:rPr b="1"/>
+              <a:t> Memory / custom instructions</a:t>
+            </a:r>
+            <a:r>
+              <a:t> — saved settings quietly reshape output.</a:t>
+            </a:r>
+          </a:p>
+          <a:p>
+            <a:pPr lvl="1"/>
+            <a:r>
+              <a:rPr b="1"/>
+              <a:t> Model version</a:t>
+            </a:r>
+            <a:r>
+              <a:t> — vendors update continuously; yesterday's answer isn't promised.</a:t>
+            </a:r>
+          </a:p>
+          <a:p>
+            <a:r>
+              <a:t> So every</a:t>
+            </a:r>
+            <a:r>
+              <a:rPr b="1"/>
+              <a:t> comparison</a:t>
+            </a:r>
+            <a:r>
+              <a:t> in this course starts from a clean slate:</a:t>
+            </a:r>
+          </a:p>
+          <a:p>
+            <a:pPr lvl="1"/>
+            <a:r>
+              <a:rPr b="1"/>
+              <a:t> New or temporary chat</a:t>
+            </a:r>
+            <a:r>
+              <a:t> , memory and custom instructions off.</a:t>
+            </a:r>
+          </a:p>
+          <a:p>
+            <a:pPr lvl="1"/>
+            <a:r>
+              <a:t> Otherwise you're comparing your settings, not the prompt or tool.</a:t>
+            </a:r>
+          </a:p>
+          <a:p>
+            <a:endParaRPr/>
+          </a:p>
+        </p:txBody>
+      </p:sp>
+      <p:sp>
+        <p:nvSpPr>
+          <p:cNvPr id="4" name="TextBox 3"/>
+          <p:cNvSpPr txBox="1"/>
+          <p:nvPr/>
+        </p:nvSpPr>
+        <p:spPr>
+          <a:xfrm>
+            <a:off x="704088" y="8065008"/>
+            <a:ext cx="8915400" cy="228600"/>
+          </a:xfrm>
+          <a:prstGeom prst="rect">
+            <a:avLst/>
+          </a:prstGeom>
+          <a:noFill/>
+        </p:spPr>
+        <p:txBody>
+          <a:bodyPr wrap="none">
+            <a:spAutoFit/>
+          </a:bodyPr>
+          <a:lstStyle/>
+          <a:p>
+            <a:r>
+              <a:rPr sz="800">
+                <a:solidFill>
+                  <a:srgbClr val="000000"/>
+                </a:solidFill>
+              </a:rPr>
+              <a:t>Copyright © 2026 by Elephant Scale, All Rights Reserved</a:t>
+            </a:r>
+          </a:p>
+        </p:txBody>
+      </p:sp>
+      <p:sp>
+        <p:nvSpPr>
+          <p:cNvPr id="5" name="Rectangle 4"/>
+          <p:cNvSpPr/>
+          <p:nvPr/>
+        </p:nvSpPr>
+        <p:spPr>
+          <a:xfrm>
+            <a:off x="495300" y="6206331"/>
+            <a:ext cx="7507224" cy="877824"/>
+          </a:xfrm>
+          <a:prstGeom prst="rect">
+            <a:avLst/>
+          </a:prstGeom>
+          <a:solidFill>
+            <a:srgbClr val="F2F2F2"/>
+          </a:solidFill>
+          <a:ln>
+            <a:solidFill>
+              <a:srgbClr val="D9D9D9"/>
+            </a:solidFill>
+          </a:ln>
+        </p:spPr>
+        <p:style>
+          <a:lnRef idx="1">
+            <a:schemeClr val="accent1"/>
+          </a:lnRef>
+          <a:fillRef idx="3">
+            <a:schemeClr val="accent1"/>
+          </a:fillRef>
+          <a:effectRef idx="2">
+            <a:schemeClr val="accent1"/>
+          </a:effectRef>
+          <a:fontRef idx="minor">
+            <a:schemeClr val="lt1"/>
+          </a:fontRef>
+        </p:style>
+        <p:txBody>
+          <a:bodyPr lIns="128016" tIns="73152" rIns="128016" bIns="73152" rtlCol="0" anchor="ctr"/>
+          <a:lstStyle/>
+          <a:p>
+            <a:pPr algn="ctr"/>
+            <a:r>
+              <a:rPr sz="1800" i="1">
+                <a:solidFill>
+                  <a:srgbClr val="333333"/>
+                </a:solidFill>
+              </a:rPr>
               <a:t>"Same prompt, different answers" is the #1 confusion. Control the variables and it vanishes.</a:t>
             </a:r>
           </a:p>
@@ -4478,7 +4457,7 @@
         </p:nvSpPr>
         <p:spPr>
           <a:xfrm>
-            <a:off x="419100" y="6200140"/>
+            <a:off x="495300" y="6265735"/>
             <a:ext cx="7507224" cy="1316736"/>
           </a:xfrm>
           <a:prstGeom prst="rect">
@@ -4599,6 +4578,16 @@
             <a:pPr lvl="1"/>
             <a:r>
               <a:rPr b="1"/>
+              <a:t> ChatGPT (OpenAI)</a:t>
+            </a:r>
+            <a:r>
+              <a:t> — our class tool. Broadest surface: data analysis, image gen, Custom GPTs &amp; Projects, voice, connectors (Gmail, Slack, Drive). The swiss-army default.</a:t>
+            </a:r>
+          </a:p>
+          <a:p>
+            <a:pPr lvl="1"/>
+            <a:r>
+              <a:rPr b="1"/>
               <a:t> Claude (Anthropic)</a:t>
             </a:r>
             <a:r>
@@ -4616,32 +4605,22 @@
             <a:pPr lvl="1"/>
             <a:r>
               <a:rPr b="1"/>
-              <a:t> ChatGPT (OpenAI)</a:t>
-            </a:r>
-            <a:r>
-              <a:t> — broadest surface: data analysis, image gen, Custom GPTs, voice, connectors. The swiss-army default.</a:t>
-            </a:r>
-          </a:p>
-          <a:p>
-            <a:pPr lvl="1"/>
+              <a:t> Gemini (Google)</a:t>
+            </a:r>
+            <a:r>
+              <a:t> — fits Google Workspace; very large context window; strong multimodal.</a:t>
+            </a:r>
+          </a:p>
+          <a:p>
+            <a:r>
+              <a:t> In class you each use</a:t>
+            </a:r>
             <a:r>
               <a:rPr b="1"/>
-              <a:t> Gemini (Google)</a:t>
-            </a:r>
-            <a:r>
-              <a:t> — fits Google Workspace; very large context window; strong multimodal.</a:t>
-            </a:r>
-          </a:p>
-          <a:p>
-            <a:r>
-              <a:t> In class you each have</a:t>
-            </a:r>
-            <a:r>
-              <a:rPr b="1"/>
-              <a:t> your own account</a:t>
-            </a:r>
-            <a:r>
-              <a:t> on one. Examples lead with Claude, note the others.</a:t>
+              <a:t> ChatGPT Enterprise</a:t>
+            </a:r>
+            <a:r>
+              <a:t> (our Business workspace). Examples lead with ChatGPT; we note the Claude/Gemini equivalents.</a:t>
             </a:r>
           </a:p>
           <a:p>
@@ -4690,8 +4669,8 @@
         </p:nvSpPr>
         <p:spPr>
           <a:xfrm>
-            <a:off x="100012" y="5825331"/>
-            <a:ext cx="9272588" cy="1492637"/>
+            <a:off x="670750" y="6512246"/>
+            <a:ext cx="7507224" cy="1316736"/>
           </a:xfrm>
           <a:prstGeom prst="rect">
             <a:avLst/>
@@ -4930,7 +4909,7 @@
         </p:nvSpPr>
         <p:spPr>
           <a:xfrm>
-            <a:off x="704088" y="6425063"/>
+            <a:off x="704088" y="6392519"/>
             <a:ext cx="7507224" cy="877824"/>
           </a:xfrm>
           <a:prstGeom prst="rect">
